--- a/海外学習_留学_グローバルオンライン教育_プレゼンテーション.pptx
+++ b/海外学習_留学_グローバルオンライン教育_プレゼンテーション.pptx
@@ -522,17 +522,12 @@
           </a:p>
           <a:p>
             <a:r>
-              <a:t>突然ですが、日本の教育って世界と比べてどうなんでしょうか？</a:t>
-            </a:r>
-          </a:p>
-          <a:p>
-            <a:r>
-              <a:t>アメリカの高校生は成績だけじゃなくて課外活動で大学合否が決まる。</a:t>
-            </a:r>
-          </a:p>
-          <a:p>
-            <a:r>
-              <a:t>イギリスでは大学に行く前に1年間、働いたり海外に出たりするのが当たり前。</a:t>
+              <a:t>アメリカの高校生は、成績だけじゃなくて課外活動で大学合否が決まる。</a:t>
+            </a:r>
+          </a:p>
+          <a:p>
+            <a:r>
+              <a:t>イギリスでは大学の前に1年間、働いたり海外に出たりするのが当たり前。</a:t>
             </a:r>
           </a:p>
           <a:p>
@@ -542,23 +537,49 @@
           </a:p>
           <a:p>
             <a:r>
-              <a:t>一方で、日本の通信制高校の進学率は過去最高を更新しています。</a:t>
+              <a:t>──じゃあ日本の通信制高校やオンライン大学は、世界から見てどうなのか？</a:t>
             </a:r>
           </a:p>
           <a:p/>
           <a:p>
             <a:r>
-              <a:t>今日は、世界のオンライン教育の最前線を日本・アメリカ・ヨーロッパの3地域で</a:t>
-            </a:r>
-          </a:p>
-          <a:p>
-            <a:r>
-              <a:t>徹底比較しながら、「これからの学び方」を一緒に考えていきたいと思います。</a:t>
-            </a:r>
-          </a:p>
-          <a:p>
-            <a:r>
-              <a:t>最後まで見ていただくと、教育の選択肢が一気に広がるはずです。</a:t>
+              <a:t>今日の動画は、通信制高校を検討している方、今通っている方、</a:t>
+            </a:r>
+          </a:p>
+          <a:p>
+            <a:r>
+              <a:t>あるいは社会人でオンライン学習を考えている方に向けてお話しします。</a:t>
+            </a:r>
+          </a:p>
+          <a:p>
+            <a:r>
+              <a:t>「将来グローバルに活躍したい」「海外大学にも興味がある」</a:t>
+            </a:r>
+          </a:p>
+          <a:p>
+            <a:r>
+              <a:t>そんな方には特に見てほしい内容です。</a:t>
+            </a:r>
+          </a:p>
+          <a:p/>
+          <a:p>
+            <a:r>
+              <a:t>前回の第1回では通信制高校の選び方を解説しました。</a:t>
+            </a:r>
+          </a:p>
+          <a:p>
+            <a:r>
+              <a:t>今回はその通信制・オンライン教育が、世界と比べてどこが進んでいて、</a:t>
+            </a:r>
+          </a:p>
+          <a:p>
+            <a:r>
+              <a:t>どこにまだ伸びしろがあるのかを徹底比較していきます。</a:t>
+            </a:r>
+          </a:p>
+          <a:p>
+            <a:r>
+              <a:t>最後に「今日からできる具体的なアクション」もお伝えするので、</a:t>
             </a:r>
           </a:p>
           <a:p>
@@ -633,85 +654,96 @@
           <a:lstStyle/>
           <a:p>
             <a:r>
-              <a:t>ここで学費を一気に比較してみましょう。3地域でかなり違いがあります。</a:t>
+              <a:t>ここで学費を一気に比較してみましょう。</a:t>
+            </a:r>
+          </a:p>
+          <a:p>
+            <a:r>
+              <a:t>まず1つ、衝撃的な数字をお見せします。</a:t>
             </a:r>
           </a:p>
           <a:p/>
           <a:p>
             <a:r>
-              <a:t>アメリカのオンライン高校は年間1,800ドルから2,800ドル、</a:t>
-            </a:r>
-          </a:p>
-          <a:p>
-            <a:r>
-              <a:t>日本円で約27万円から42万円です。ただし高額なところは2万ドル、</a:t>
-            </a:r>
-          </a:p>
-          <a:p>
-            <a:r>
-              <a:t>つまり300万円を超える学校もあります。</a:t>
-            </a:r>
-          </a:p>
-          <a:p>
-            <a:r>
-              <a:t>大学レベルになると学士号の取得に600万円から950万円。</a:t>
-            </a:r>
-          </a:p>
-          <a:p>
-            <a:r>
-              <a:t>アメリカの教育費はやはり高いですが、</a:t>
-            </a:r>
-          </a:p>
-          <a:p>
-            <a:r>
-              <a:t>通学費や寮費がかからないのはオンラインの大きなメリットです。</a:t>
+              <a:t>アメリカのオンライン大学で学士号を取ると、600万円から950万円。</a:t>
+            </a:r>
+          </a:p>
+          <a:p>
+            <a:r>
+              <a:t>日本のZEN大学は4年間で152万円。</a:t>
+            </a:r>
+          </a:p>
+          <a:p>
+            <a:r>
+              <a:t>同じ「オンラインで大学卒業」なのに、5〜6倍の差があるんです。</a:t>
+            </a:r>
+          </a:p>
+          <a:p>
+            <a:r>
+              <a:t>これ、すごくないですか？</a:t>
             </a:r>
           </a:p>
           <a:p/>
           <a:p>
             <a:r>
+              <a:t>高校レベルでも差は歴然です。</a:t>
+            </a:r>
+          </a:p>
+          <a:p>
+            <a:r>
+              <a:t>アメリカのオンライン高校が年間27万円から42万円。</a:t>
+            </a:r>
+          </a:p>
+          <a:p>
+            <a:r>
+              <a:t>日本の公立通信制は年間1万6千円から5万円。</a:t>
+            </a:r>
+          </a:p>
+          <a:p>
+            <a:r>
+              <a:t>桁が違いますよね。</a:t>
+            </a:r>
+          </a:p>
+          <a:p/>
+          <a:p>
+            <a:r>
               <a:t>ヨーロッパは「教育は人権」という理念があるので、</a:t>
             </a:r>
           </a:p>
           <a:p>
             <a:r>
-              <a:t>EU/EEA圏の学生は大学の授業料がほぼ無料というケースが多いです。</a:t>
-            </a:r>
-          </a:p>
-          <a:p>
-            <a:r>
-              <a:t>非EU圏の学生でも年間5,000ユーロからで、アメリカと比べると格段に安い。</a:t>
+              <a:t>EU圏の学生は大学がほぼ無料。</a:t>
+            </a:r>
+          </a:p>
+          <a:p>
+            <a:r>
+              <a:t>日本人でも年間5,000ユーロから学べるので、アメリカより格段に安いです。</a:t>
             </a:r>
           </a:p>
           <a:p/>
           <a:p>
             <a:r>
-              <a:t>そして日本。公立の通信制高校なら年間1万6千円から5万円。</a:t>
-            </a:r>
-          </a:p>
-          <a:p>
-            <a:r>
-              <a:t>就学支援金を使えば実質無料になることもあります。</a:t>
-            </a:r>
-          </a:p>
-          <a:p>
-            <a:r>
-              <a:t>全日制の高校は平均51万円ですから、通信制のコストメリットは明白です。</a:t>
-            </a:r>
-          </a:p>
-          <a:p>
-            <a:r>
-              <a:t>ZEN大学は年間38万円。国際的に見ても非常に安い設定と言えます。</a:t>
-            </a:r>
-          </a:p>
-          <a:p>
-            <a:r>
-              <a:t>ただし「安かろう悪かろう」ではなく、</a:t>
-            </a:r>
-          </a:p>
-          <a:p>
-            <a:r>
-              <a:t>中身の質をどう保証するかが次のポイントになります。</a:t>
+              <a:t>つまり日本の通信制は、費用面では世界最強クラスなんです。</a:t>
+            </a:r>
+          </a:p>
+          <a:p>
+            <a:r>
+              <a:t>問題は「安かろう悪かろう」ではないかどうか。</a:t>
+            </a:r>
+          </a:p>
+          <a:p>
+            <a:r>
+              <a:t>次のスライドで質保証の仕組みを見ていきましょう。</a:t>
+            </a:r>
+          </a:p>
+          <a:p>
+            <a:r>
+              <a:t>ちなみに細かい費用の比較表は概要欄に載せておきますので、</a:t>
+            </a:r>
+          </a:p>
+          <a:p>
+            <a:r>
+              <a:t>あとでチェックしてみてください。</a:t>
             </a:r>
           </a:p>
         </p:txBody>
@@ -1097,76 +1129,82 @@
           <a:lstStyle/>
           <a:p>
             <a:r>
-              <a:t>ここまで高校や大学の制度を見てきましたが、</a:t>
-            </a:r>
-          </a:p>
-          <a:p>
-            <a:r>
-              <a:t>もう1つ大きな選択肢があります。MOOCsです。</a:t>
-            </a:r>
-          </a:p>
-          <a:p>
-            <a:r>
-              <a:t>Massive Open Online Courses、大規模公開オンライン講座のことです。</a:t>
+              <a:t>ここまで各国の制度を見てきましたが、</a:t>
+            </a:r>
+          </a:p>
+          <a:p>
+            <a:r>
+              <a:t>「で、自分は今日から何ができるの？」というのが一番大事ですよね。</a:t>
+            </a:r>
+          </a:p>
+          <a:p>
+            <a:r>
+              <a:t>ここでは具体的なアクションをお伝えします。</a:t>
             </a:r>
           </a:p>
           <a:p/>
           <a:p>
             <a:r>
-              <a:t>代表格はCoursera。Googleの認定証やMITの講座が受けられて、</a:t>
-            </a:r>
-          </a:p>
-          <a:p>
-            <a:r>
-              <a:t>修了証は実際に履歴書に書けます。</a:t>
-            </a:r>
-          </a:p>
-          <a:p>
-            <a:r>
-              <a:t>「Courseraの修了証がきっかけで転職できた」</a:t>
-            </a:r>
-          </a:p>
-          <a:p>
-            <a:r>
-              <a:t>「社内の評価が上がった」という事例も報告されています。</a:t>
-            </a:r>
-          </a:p>
-          <a:p>
-            <a:r>
-              <a:t>月額59ドルから、年間プランだと399ドルからです。</a:t>
+              <a:t>まず、今日この動画を見終わったら1つだけやってみてください。</a:t>
+            </a:r>
+          </a:p>
+          <a:p>
+            <a:r>
+              <a:t>Courseraで「Google Career Certificates」と検索するんです。</a:t>
+            </a:r>
+          </a:p>
+          <a:p>
+            <a:r>
+              <a:t>無料で講座の中身を見ることができます。</a:t>
+            </a:r>
+          </a:p>
+          <a:p>
+            <a:r>
+              <a:t>これがアメリカの学生が実際に受けているオンライン学習のレベルです。</a:t>
+            </a:r>
+          </a:p>
+          <a:p>
+            <a:r>
+              <a:t>「あ、自分でもできるかも」と思えたら、それが第一歩です。</a:t>
             </a:r>
           </a:p>
           <a:p/>
           <a:p>
             <a:r>
-              <a:t>Udemyはもっと手軽で、セールのときは1,200円台でコースが買えることもあります。</a:t>
-            </a:r>
-          </a:p>
-          <a:p>
-            <a:r>
-              <a:t>20万コース以上あるので、ほぼどんな分野でも見つかるでしょう。</a:t>
+              <a:t>Courseraの修了証は実際に履歴書に書けますし、</a:t>
+            </a:r>
+          </a:p>
+          <a:p>
+            <a:r>
+              <a:t>「Courseraの修了証がきっかけで転職できた」という事例も報告されています。</a:t>
             </a:r>
           </a:p>
           <a:p/>
           <a:p>
             <a:r>
-              <a:t>edXは非営利性が特徴で、東京大学がMITやハーバードと</a:t>
-            </a:r>
-          </a:p>
-          <a:p>
-            <a:r>
-              <a:t>連携した講座を公開していたりもします。</a:t>
+              <a:t>もっと手軽に始めたいなら、Udemyがおすすめです。</a:t>
+            </a:r>
+          </a:p>
+          <a:p>
+            <a:r>
+              <a:t>セールのときは1,200円台でコースが買えることもあります。</a:t>
             </a:r>
           </a:p>
           <a:p/>
           <a:p>
             <a:r>
-              <a:t>1つ注意していただきたいのは、講義自体は無料で見られるケースが多いんですが、</a:t>
-            </a:r>
-          </a:p>
-          <a:p>
-            <a:r>
-              <a:t>修了証を取得するには有料プランへの加入が必要になることがほとんどです。</a:t>
+              <a:t>edXでは東京大学がMITやハーバードと連携した講座を出していますし、</a:t>
+            </a:r>
+          </a:p>
+          <a:p>
+            <a:r>
+              <a:t>英語力を上げたいならオンライン英会話が月額2,000円からで始められます。</a:t>
+            </a:r>
+          </a:p>
+          <a:p/>
+          <a:p>
+            <a:r>
+              <a:t>1つ注意点として、講義は無料でも修了証は有料というケースが多いです。</a:t>
             </a:r>
           </a:p>
           <a:p>
@@ -1176,7 +1214,12 @@
           </a:p>
           <a:p>
             <a:r>
-              <a:t>自宅から取れるというのは、大きな武器になりますよね。</a:t>
+              <a:t>自宅から取れるのは、大きな武器ですよね。</a:t>
+            </a:r>
+          </a:p>
+          <a:p>
+            <a:r>
+              <a:t>具体的なリンクは概要欄に全部貼っておきますので、チェックしてみてください。</a:t>
             </a:r>
           </a:p>
         </p:txBody>
@@ -1246,102 +1289,123 @@
           <a:lstStyle/>
           <a:p>
             <a:r>
-              <a:t>ここまでの比較を踏まえて、日本のオンライン教育に何が必要なのか、</a:t>
-            </a:r>
-          </a:p>
-          <a:p>
-            <a:r>
-              <a:t>5つのポイントに整理してみました。</a:t>
+              <a:t>さて、ここが今日の動画で一番大事なパートです。</a:t>
+            </a:r>
+          </a:p>
+          <a:p>
+            <a:r>
+              <a:t>世界の教育を比較してきましたが、「で、自分はどうすればいいの？」</a:t>
+            </a:r>
+          </a:p>
+          <a:p>
+            <a:r>
+              <a:t>ということで、今日からできることを5つにまとめました。</a:t>
             </a:r>
           </a:p>
           <a:p/>
           <a:p>
             <a:r>
-              <a:t>1つ目は質保証の仕組みです。</a:t>
-            </a:r>
-          </a:p>
-          <a:p>
-            <a:r>
-              <a:t>ヨーロッパにはESGという共通基準がありますが、日本にはまだありません。</a:t>
-            </a:r>
-          </a:p>
-          <a:p>
-            <a:r>
-              <a:t>オンライン教育が増えていくなかで、</a:t>
-            </a:r>
-          </a:p>
-          <a:p>
-            <a:r>
-              <a:t>「この学校は本当に信頼できるのか」を判断する仕組みが必要です。</a:t>
+              <a:t>1つ目。さっきも言いましたが、Courseraで無料講座を1つ受けてみてください。</a:t>
+            </a:r>
+          </a:p>
+          <a:p>
+            <a:r>
+              <a:t>Google Career Certificatesがおすすめです。</a:t>
+            </a:r>
+          </a:p>
+          <a:p>
+            <a:r>
+              <a:t>世界のオンライン学習のレベルを体感できます。</a:t>
             </a:r>
           </a:p>
           <a:p/>
           <a:p>
             <a:r>
-              <a:t>2つ目はデジタルデバイドの解消。</a:t>
-            </a:r>
-          </a:p>
-          <a:p>
-            <a:r>
-              <a:t>ネット環境やパソコンが手に入らない人を取り残してはいけません。</a:t>
+              <a:t>2つ目。自分の学校のサポート体制を確認してみてください。</a:t>
+            </a:r>
+          </a:p>
+          <a:p>
+            <a:r>
+              <a:t>カウンセラーに相談できるのか、キャリア支援はあるのか、課外活動は何がある？</a:t>
+            </a:r>
+          </a:p>
+          <a:p>
+            <a:r>
+              <a:t>意外と使っていないサービスがあるかもしれません。</a:t>
             </a:r>
           </a:p>
           <a:p/>
           <a:p>
             <a:r>
-              <a:t>3つ目はハイブリッド型の学習です。</a:t>
-            </a:r>
-          </a:p>
-          <a:p>
-            <a:r>
-              <a:t>オンラインだけだと社会性が育ちにくいという課題がありましたよね。</a:t>
-            </a:r>
-          </a:p>
-          <a:p>
-            <a:r>
-              <a:t>ヨーロッパのCOILのように、国を超えた学生同士の協働をオンラインで実現しながら、</a:t>
-            </a:r>
-          </a:p>
-          <a:p>
-            <a:r>
-              <a:t>対面の機会も組み合わせていく。そのバランスが大事です。</a:t>
+              <a:t>3つ目。海外のオンライン高校や大学のサイトを覗いてみてください。</a:t>
+            </a:r>
+          </a:p>
+          <a:p>
+            <a:r>
+              <a:t>英語のサイトでも、Google翻訳で十分読めます。</a:t>
+            </a:r>
+          </a:p>
+          <a:p>
+            <a:r>
+              <a:t>「あ、自分でも入れるかも」と思えたら、次回の第3回動画で</a:t>
+            </a:r>
+          </a:p>
+          <a:p>
+            <a:r>
+              <a:t>具体的な入学ステップを解説しますので、そちらも見てください。</a:t>
             </a:r>
           </a:p>
           <a:p/>
           <a:p>
             <a:r>
-              <a:t>4つ目は教員の育成です。</a:t>
-            </a:r>
-          </a:p>
-          <a:p>
-            <a:r>
-              <a:t>オンライン教育では教員に「ファシリテーター」や「コースデザイナー」</a:t>
-            </a:r>
-          </a:p>
-          <a:p>
-            <a:r>
-              <a:t>としての新しいスキルが求められますが、</a:t>
-            </a:r>
-          </a:p>
-          <a:p>
-            <a:r>
-              <a:t>多くの教員がまだ対応できていないのが現状です。</a:t>
+              <a:t>4つ目。YouTubeで「gap year experience」と検索してみてください。</a:t>
+            </a:r>
+          </a:p>
+          <a:p>
+            <a:r>
+              <a:t>イギリスやアメリカの学生がギャップイヤーの体験を</a:t>
+            </a:r>
+          </a:p>
+          <a:p>
+            <a:r>
+              <a:t>vlogで公開しています。見るだけで視野が広がりますよ。</a:t>
             </a:r>
           </a:p>
           <a:p/>
           <a:p>
             <a:r>
-              <a:t>5つ目はキャリア支援の充実です。</a:t>
-            </a:r>
-          </a:p>
-          <a:p>
-            <a:r>
-              <a:t>アメリカのオンライン高校のように、</a:t>
-            </a:r>
-          </a:p>
-          <a:p>
-            <a:r>
-              <a:t>大学出願から就職まで一貫してサポートする体制を日本でも広げていくべきです。</a:t>
+              <a:t>5つ目。この動画のコメント欄で、あなたの学び方をシェアしてください。</a:t>
+            </a:r>
+          </a:p>
+          <a:p>
+            <a:r>
+              <a:t>「通信制でこう学んでいる」「MOOCsをこう使っている」</a:t>
+            </a:r>
+          </a:p>
+          <a:p>
+            <a:r>
+              <a:t>そういうリアルな声が、同じ悩みを持つ誰かの助けになります。</a:t>
+            </a:r>
+          </a:p>
+          <a:p/>
+          <a:p>
+            <a:r>
+              <a:t>日本のオンライン教育にはまだ課題があります。</a:t>
+            </a:r>
+          </a:p>
+          <a:p>
+            <a:r>
+              <a:t>でも逆に言えば、今オンラインで学ぶことを選んでいるあなたは、</a:t>
+            </a:r>
+          </a:p>
+          <a:p>
+            <a:r>
+              <a:t>日本の教育が変わっていく最前線にいるということです。</a:t>
+            </a:r>
+          </a:p>
+          <a:p>
+            <a:r>
+              <a:t>あなたは課題の当事者じゃない。変化の主体なんです。</a:t>
             </a:r>
           </a:p>
         </p:txBody>
@@ -1417,59 +1481,79 @@
           <a:p/>
           <a:p>
             <a:r>
-              <a:t>まず世界の潮流として、オンライン教育はもう一時的なブームではありません。</a:t>
-            </a:r>
-          </a:p>
-          <a:p>
-            <a:r>
-              <a:t>コロナが終わっても成長は止まっておらず、</a:t>
-            </a:r>
-          </a:p>
-          <a:p>
-            <a:r>
-              <a:t>2030年には85兆円規模になると予測されています。</a:t>
+              <a:t>オンライン教育はもう一時的なブームではなく、教育の中核になりつつあります。</a:t>
+            </a:r>
+          </a:p>
+          <a:p>
+            <a:r>
+              <a:t>2030年には85兆円規模になると予測されている。</a:t>
+            </a:r>
+          </a:p>
+          <a:p>
+            <a:r>
+              <a:t>その中で皆さんは、まさに最前線にいるわけです。</a:t>
             </a:r>
           </a:p>
           <a:p/>
           <a:p>
             <a:r>
-              <a:t>アメリカは大学進学を徹底的にサポートする伴走型。</a:t>
-            </a:r>
-          </a:p>
-          <a:p>
-            <a:r>
-              <a:t>ヨーロッパは「教育は人権」という思想と共通の質保証基準。</a:t>
-            </a:r>
-          </a:p>
-          <a:p>
-            <a:r>
-              <a:t>日本は通信制の柔軟性とコストの安さが強みで、進学率は過去最高を更新中。</a:t>
-            </a:r>
-          </a:p>
-          <a:p>
-            <a:r>
-              <a:t>それぞれの地域に、それぞれの良さがあります。</a:t>
+              <a:t>今日見てきた中で覚えておいてほしいのは3つ。</a:t>
+            </a:r>
+          </a:p>
+          <a:p>
+            <a:r>
+              <a:t>1つ目、日本の通信制は学費の安さでは世界最高レベル。</a:t>
+            </a:r>
+          </a:p>
+          <a:p>
+            <a:r>
+              <a:t>2つ目、アメリカの「伴走型サポート」と</a:t>
+            </a:r>
+          </a:p>
+          <a:p>
+            <a:r>
+              <a:t>ヨーロッパの「質保証の仕組み」は日本も取り入れるべき。</a:t>
+            </a:r>
+          </a:p>
+          <a:p>
+            <a:r>
+              <a:t>3つ目、そして一番大事なこと──</a:t>
+            </a:r>
+          </a:p>
+          <a:p>
+            <a:r>
+              <a:t>「全日制に通うだけが正解ではない時代」に、</a:t>
+            </a:r>
+          </a:p>
+          <a:p>
+            <a:r>
+              <a:t>自分で学び方を選んでいるあなたは、すでに一歩先を行っています。</a:t>
             </a:r>
           </a:p>
           <a:p/>
           <a:p>
             <a:r>
-              <a:t>大事なのは、皆さん自身がどう学ぶかを自分で選ぶということです。</a:t>
-            </a:r>
-          </a:p>
-          <a:p>
-            <a:r>
-              <a:t>通信制高校、MOOCs、ギャップイヤー、海外留学、ワーキングホリデー。</a:t>
-            </a:r>
-          </a:p>
-          <a:p>
-            <a:r>
-              <a:t>もはや「全日制の学校に毎日通う」だけが唯一の正解ではない時代です。</a:t>
-            </a:r>
-          </a:p>
-          <a:p>
-            <a:r>
-              <a:t>今日の動画が、皆さんの学び方を考えるきっかけになれば嬉しいです。</a:t>
+              <a:t>この動画は「教育の選択肢シリーズ」の第2回です。</a:t>
+            </a:r>
+          </a:p>
+          <a:p>
+            <a:r>
+              <a:t>第1回の「通信制高校の選び方」をまだ見ていない方は、</a:t>
+            </a:r>
+          </a:p>
+          <a:p>
+            <a:r>
+              <a:t>概要欄にリンクがありますのでぜひチェックしてください。</a:t>
+            </a:r>
+          </a:p>
+          <a:p>
+            <a:r>
+              <a:t>そして次回の第3回では「海外の通信制高校に日本から入学する方法」を</a:t>
+            </a:r>
+          </a:p>
+          <a:p>
+            <a:r>
+              <a:t>具体的なステップで解説していきます。</a:t>
             </a:r>
           </a:p>
         </p:txBody>
@@ -1545,49 +1629,91 @@
           <a:p/>
           <a:p>
             <a:r>
-              <a:t>今日は日本・アメリカ・ヨーロッパのオンライン教育を比較してきましたが、</a:t>
-            </a:r>
-          </a:p>
-          <a:p>
-            <a:r>
-              <a:t>いかがだったでしょうか。</a:t>
+              <a:t>今日は日本・アメリカ・ヨーロッパのオンライン教育を比較して、</a:t>
+            </a:r>
+          </a:p>
+          <a:p>
+            <a:r>
+              <a:t>日本の通信制の「強み」と「伸びしろ」を見てきました。</a:t>
             </a:r>
           </a:p>
           <a:p/>
           <a:p>
             <a:r>
-              <a:t>この動画が参考になったと思っていただけたら、</a:t>
-            </a:r>
-          </a:p>
-          <a:p>
-            <a:r>
-              <a:t>ぜひチャンネル登録と高評価をお願いします。</a:t>
-            </a:r>
-          </a:p>
-          <a:p>
-            <a:r>
-              <a:t>コメント欄で感想や質問もお待ちしています。</a:t>
-            </a:r>
-          </a:p>
-          <a:p>
-            <a:r>
-              <a:t>「自分はこういう学び方をしている」「こんな選択肢もあるよ」</a:t>
-            </a:r>
-          </a:p>
-          <a:p>
-            <a:r>
-              <a:t>という皆さんのシェアも大歓迎です。</a:t>
+              <a:t>覚えておいてほしいのは、</a:t>
+            </a:r>
+          </a:p>
+          <a:p>
+            <a:r>
+              <a:t>オンラインで学ぶことを選んでいるあなたは、</a:t>
+            </a:r>
+          </a:p>
+          <a:p>
+            <a:r>
+              <a:t>日本の教育が変わっていく最前線にいるということです。</a:t>
             </a:r>
           </a:p>
           <a:p/>
           <a:p>
             <a:r>
-              <a:t>次回は「海外の通信制高校に日本から入学する方法」をテーマに、</a:t>
-            </a:r>
-          </a:p>
-          <a:p>
-            <a:r>
-              <a:t>具体的なステップを解説していく予定です。</a:t>
+              <a:t>今日お伝えした「5つのアクション」、</a:t>
+            </a:r>
+          </a:p>
+          <a:p>
+            <a:r>
+              <a:t>まずは1つでいいので試してみてください。</a:t>
+            </a:r>
+          </a:p>
+          <a:p>
+            <a:r>
+              <a:t>Courseraで「Google Career Certificates」を検索するだけなら、</a:t>
+            </a:r>
+          </a:p>
+          <a:p>
+            <a:r>
+              <a:t>5分でできます。</a:t>
+            </a:r>
+          </a:p>
+          <a:p/>
+          <a:p>
+            <a:r>
+              <a:t>そしてコメント欄で、あなたの学び方をシェアしてくれたら嬉しいです。</a:t>
+            </a:r>
+          </a:p>
+          <a:p>
+            <a:r>
+              <a:t>「通信制でこう学んでいる」「MOOCsでこれを受けた」</a:t>
+            </a:r>
+          </a:p>
+          <a:p>
+            <a:r>
+              <a:t>そういうリアルな声が、同じ悩みを持つ誰かの背中を押します。</a:t>
+            </a:r>
+          </a:p>
+          <a:p/>
+          <a:p>
+            <a:r>
+              <a:t>この動画は「教育の選択肢シリーズ」の第2回です。</a:t>
+            </a:r>
+          </a:p>
+          <a:p>
+            <a:r>
+              <a:t>第1回の「通信制高校の選び方」は概要欄にリンクがあります。</a:t>
+            </a:r>
+          </a:p>
+          <a:p>
+            <a:r>
+              <a:t>次回の第3回では「海外の通信制高校に日本から入学する方法」を</a:t>
+            </a:r>
+          </a:p>
+          <a:p>
+            <a:r>
+              <a:t>具体的なステップで解説していきますので、</a:t>
+            </a:r>
+          </a:p>
+          <a:p>
+            <a:r>
+              <a:t>見逃さないようにチャンネル登録をお願いします。</a:t>
             </a:r>
           </a:p>
           <a:p>
@@ -1662,37 +1788,49 @@
           <a:lstStyle/>
           <a:p>
             <a:r>
-              <a:t>今日の動画では、この8つのテーマでお話ししていきます。</a:t>
-            </a:r>
-          </a:p>
-          <a:p>
-            <a:r>
-              <a:t>まず世界のオンライン教育がどれだけ成長しているかという全体像をお見せした後、</a:t>
-            </a:r>
-          </a:p>
-          <a:p>
-            <a:r>
-              <a:t>各国の高校生・大学生が実際にどんな学び方をしているのか、具体的に見ていきます。</a:t>
-            </a:r>
-          </a:p>
-          <a:p>
-            <a:r>
-              <a:t>その上で、日本の通信制高校やオンライン大学の現状を、</a:t>
-            </a:r>
-          </a:p>
-          <a:p>
-            <a:r>
-              <a:t>アメリカ・ヨーロッパと比較しながら解説します。</a:t>
-            </a:r>
-          </a:p>
-          <a:p>
-            <a:r>
-              <a:t>最後に、CourseraやUdemyといったオンライン学習プラットフォームの活用法と、</a:t>
-            </a:r>
-          </a:p>
-          <a:p>
-            <a:r>
-              <a:t>皆さんがこれからの学び方を選ぶときのヒントをお伝えします。</a:t>
+              <a:t>今日の動画では、この7つのテーマでお話ししていきます。</a:t>
+            </a:r>
+          </a:p>
+          <a:p>
+            <a:r>
+              <a:t>前回の第1回動画では通信制高校の選び方を解説しましたが、</a:t>
+            </a:r>
+          </a:p>
+          <a:p>
+            <a:r>
+              <a:t>今回はその通信制を「世界基準」で評価し直してみます。</a:t>
+            </a:r>
+          </a:p>
+          <a:p/>
+          <a:p>
+            <a:r>
+              <a:t>特に注目していただきたいのは、学費の比較です。</a:t>
+            </a:r>
+          </a:p>
+          <a:p>
+            <a:r>
+              <a:t>同じオンラインで大学卒業するのに、アメリカと日本で5倍以上の差がある。</a:t>
+            </a:r>
+          </a:p>
+          <a:p>
+            <a:r>
+              <a:t>この事実を知っているかどうかで、進路の考え方が変わるはずです。</a:t>
+            </a:r>
+          </a:p>
+          <a:p/>
+          <a:p>
+            <a:r>
+              <a:t>そして最後に、今日この動画を見終わった後に</a:t>
+            </a:r>
+          </a:p>
+          <a:p>
+            <a:r>
+              <a:t>実際にできる具体的なアクションもお伝えします。</a:t>
+            </a:r>
+          </a:p>
+          <a:p>
+            <a:r>
+              <a:t>ぜひ最後まで見てくださいね。</a:t>
             </a:r>
           </a:p>
         </p:txBody>
@@ -1778,6 +1916,27 @@
           <a:p/>
           <a:p>
             <a:r>
+              <a:t>で、この数字が皆さんにとって何を意味するかというと──</a:t>
+            </a:r>
+          </a:p>
+          <a:p>
+            <a:r>
+              <a:t>今オンラインで学んでいるあなたの経験は、</a:t>
+            </a:r>
+          </a:p>
+          <a:p>
+            <a:r>
+              <a:t>10年後の社会では「当たり前のスキル」になるということです。</a:t>
+            </a:r>
+          </a:p>
+          <a:p>
+            <a:r>
+              <a:t>通信制やオンライン学習を選ぶこと自体が、実は最先端の経験なんですね。</a:t>
+            </a:r>
+          </a:p>
+          <a:p/>
+          <a:p>
+            <a:r>
               <a:t>注目すべきは、コロナが終わった後も成長が止まっていないということです。</a:t>
             </a:r>
           </a:p>
@@ -1809,7 +1968,12 @@
           </a:p>
           <a:p>
             <a:r>
-              <a:t>教育システムの中核になりつつあるということです。</a:t>
+              <a:t>教育システムの中核になりつつある。</a:t>
+            </a:r>
+          </a:p>
+          <a:p>
+            <a:r>
+              <a:t>皆さんは、その変化のまさに渦中にいるわけです。</a:t>
             </a:r>
           </a:p>
         </p:txBody>
@@ -2011,100 +2175,106 @@
           <a:lstStyle/>
           <a:p>
             <a:r>
-              <a:t>ここからは国別に、高校生や大学生が実際に何をしているのか見ていきましょう。</a:t>
+              <a:t>ここからが今日のハイライトです。</a:t>
+            </a:r>
+          </a:p>
+          <a:p>
+            <a:r>
+              <a:t>世界の高校生が実際に何をしているのか、国別に見ていきましょう。</a:t>
             </a:r>
           </a:p>
           <a:p/>
           <a:p>
             <a:r>
-              <a:t>まずアメリカ。アメリカの大学入試は日本とまったく違います。</a:t>
-            </a:r>
-          </a:p>
-          <a:p>
-            <a:r>
-              <a:t>テストの点数だけでは入れないんです。</a:t>
-            </a:r>
-          </a:p>
-          <a:p>
-            <a:r>
-              <a:t>クラブ活動、ボランティア、インターンシップ。</a:t>
-            </a:r>
-          </a:p>
-          <a:p>
-            <a:r>
-              <a:t>しかも大事なのは「たくさんやること」じゃなくて「1つか2つを長く深く続けること」。</a:t>
-            </a:r>
-          </a:p>
-          <a:p>
-            <a:r>
-              <a:t>大学側は面接で「なぜその活動を選んだのか」「何を学んだのか」を徹底的に聞いてきます。</a:t>
-            </a:r>
-          </a:p>
-          <a:p>
-            <a:r>
-              <a:t>つまり、知識量よりも「どんな人間か」が問われるんですね。</a:t>
+              <a:t>まずアメリカ。これ、びっくりする方多いと思うんですが、</a:t>
+            </a:r>
+          </a:p>
+          <a:p>
+            <a:r>
+              <a:t>アメリカではテストの点数だけでは大学に入れないんです。</a:t>
+            </a:r>
+          </a:p>
+          <a:p>
+            <a:r>
+              <a:t>クラブ活動やボランティア、インターンシップ。</a:t>
+            </a:r>
+          </a:p>
+          <a:p>
+            <a:r>
+              <a:t>大事なのは「たくさんやること」じゃなくて「1つを長く深く続けること」。</a:t>
+            </a:r>
+          </a:p>
+          <a:p>
+            <a:r>
+              <a:t>大学は面接で「なぜその活動を選んだのか」を徹底的に聞いてきます。</a:t>
+            </a:r>
+          </a:p>
+          <a:p>
+            <a:r>
+              <a:t>つまり「どんな人間か」が問われるんですね。</a:t>
+            </a:r>
+          </a:p>
+          <a:p>
+            <a:r>
+              <a:t>皆さんはどう思いますか？日本と全然違いますよね。</a:t>
             </a:r>
           </a:p>
           <a:p/>
           <a:p>
             <a:r>
-              <a:t>次にイギリス。イギリスには「ギャップイヤー」という文化があります。</a:t>
-            </a:r>
-          </a:p>
-          <a:p>
-            <a:r>
-              <a:t>大学に入る前、あるいは卒業後に1年間、働いたり海外に行ったりする期間です。</a:t>
-            </a:r>
-          </a:p>
-          <a:p>
-            <a:r>
-              <a:t>驚くべきことに、企業の94パーセントが</a:t>
-            </a:r>
-          </a:p>
-          <a:p>
-            <a:r>
-              <a:t>「ギャップイヤーを経験した人を積極的に採用したい」と回答しています。</a:t>
-            </a:r>
-          </a:p>
-          <a:p>
-            <a:r>
-              <a:t>日本では「空白期間」はマイナスに見られがちですが、</a:t>
-            </a:r>
-          </a:p>
-          <a:p>
-            <a:r>
-              <a:t>イギリスでは逆に「主体性がある」「問題解決能力が高い」と評価されるんです。</a:t>
+              <a:t>次にイギリス。「ギャップイヤー」という文化があって、</a:t>
+            </a:r>
+          </a:p>
+          <a:p>
+            <a:r>
+              <a:t>大学の前後に1年間、働いたり海外に行ったりするんです。</a:t>
+            </a:r>
+          </a:p>
+          <a:p>
+            <a:r>
+              <a:t>しかも企業の94パーセントが「ギャップイヤー経験者を積極採用したい」と回答。</a:t>
+            </a:r>
+          </a:p>
+          <a:p>
+            <a:r>
+              <a:t>日本だと「空白期間」はマイナスですよね？</a:t>
+            </a:r>
+          </a:p>
+          <a:p>
+            <a:r>
+              <a:t>イギリスでは逆に「主体性がある」と評価されるんです。</a:t>
             </a:r>
           </a:p>
           <a:p/>
           <a:p>
             <a:r>
-              <a:t>アジアに目を向けると、韓国の受験戦争は壮絶です。</a:t>
-            </a:r>
-          </a:p>
-          <a:p>
-            <a:r>
-              <a:t>ソウル大学・高麗大学・延世大学、通称「SKY大学」に入るために</a:t>
-            </a:r>
-          </a:p>
-          <a:p>
-            <a:r>
-              <a:t>高校生は文字通り深夜まで塾に通い続けます。</a:t>
-            </a:r>
-          </a:p>
-          <a:p>
-            <a:r>
-              <a:t>一方シンガポールは大学進学率を3〜4割に絞っていて、</a:t>
-            </a:r>
-          </a:p>
-          <a:p>
-            <a:r>
-              <a:t>ポリテクニックやITEという職業訓練校が主要な進路として確立されています。</a:t>
-            </a:r>
-          </a:p>
-          <a:p>
-            <a:r>
-              <a:t>「全員が大学に行く必要はない」という割り切りが、実はとても合理的なんですね。</a:t>
+              <a:t>アジアでは韓国の受験戦争が壮絶で、</a:t>
+            </a:r>
+          </a:p>
+          <a:p>
+            <a:r>
+              <a:t>高校生が文字通り深夜まで塾に通い続けます。</a:t>
+            </a:r>
+          </a:p>
+          <a:p>
+            <a:r>
+              <a:t>一方シンガポールは「全員が大学に行く必要はない」と割り切って、</a:t>
+            </a:r>
+          </a:p>
+          <a:p>
+            <a:r>
+              <a:t>職業訓練校を主要な進路として確立しています。</a:t>
+            </a:r>
+          </a:p>
+          <a:p/>
+          <a:p>
+            <a:r>
+              <a:t>この3つの中で、皆さんが一番驚いたのはどれですか？</a:t>
+            </a:r>
+          </a:p>
+          <a:p>
+            <a:r>
+              <a:t>ぜひコメント欄で教えてください。</a:t>
             </a:r>
           </a:p>
         </p:txBody>
@@ -2179,22 +2349,17 @@
           </a:p>
           <a:p>
             <a:r>
-              <a:t>まずカリキュラム。数学や理科といったコア科目はもちろんですが、</a:t>
-            </a:r>
-          </a:p>
-          <a:p>
-            <a:r>
-              <a:t>AP、つまりAdvanced Placementという大学レベルの授業を</a:t>
-            </a:r>
-          </a:p>
-          <a:p>
-            <a:r>
-              <a:t>高校のうちから受けられるんです。</a:t>
-            </a:r>
-          </a:p>
-          <a:p>
-            <a:r>
-              <a:t>大学進学を目指す生徒向けに、かなり戦略的なカリキュラムが組まれています。</a:t>
+              <a:t>まずカリキュラム。AP、つまりAdvanced Placementという</a:t>
+            </a:r>
+          </a:p>
+          <a:p>
+            <a:r>
+              <a:t>大学レベルの授業を高校のうちから受けられるんです。</a:t>
+            </a:r>
+          </a:p>
+          <a:p>
+            <a:r>
+              <a:t>大学進学を目指す生徒向けに、かなり戦略的な設計になっています。</a:t>
             </a:r>
           </a:p>
           <a:p/>
@@ -2205,43 +2370,69 @@
           </a:p>
           <a:p>
             <a:r>
-              <a:t>科目ごとに専門の先生がいるのはもちろん、</a:t>
-            </a:r>
-          </a:p>
-          <a:p>
-            <a:r>
-              <a:t>それとは別にホームルームの先生が全科目の学習状況を見てくれます。</a:t>
-            </a:r>
-          </a:p>
-          <a:p>
-            <a:r>
-              <a:t>さらに専任のスクールカウンセラーが常駐していて、</a:t>
-            </a:r>
-          </a:p>
-          <a:p>
-            <a:r>
-              <a:t>4年間の学習計画を一緒に作ってくれたり、大学の出願プロセスを手伝ってくれたり、</a:t>
-            </a:r>
-          </a:p>
-          <a:p>
-            <a:r>
-              <a:t>奨学金の情報を提供してくれたりします。</a:t>
+              <a:t>科目ごとの専門教員、全科目をモニタリングするホームルーム教員、</a:t>
+            </a:r>
+          </a:p>
+          <a:p>
+            <a:r>
+              <a:t>そして専任のスクールカウンセラー。この3層で、</a:t>
+            </a:r>
+          </a:p>
+          <a:p>
+            <a:r>
+              <a:t>4年間の学習計画から大学出願、奨学金情報まで一貫してサポートしてくれます。</a:t>
+            </a:r>
+          </a:p>
+          <a:p>
+            <a:r>
+              <a:t>「オンラインで授業が受けられる」だけじゃなくて、</a:t>
+            </a:r>
+          </a:p>
+          <a:p>
+            <a:r>
+              <a:t>大学合格までの道筋をまるごと面倒見てくれる仕組みなんですね。</a:t>
             </a:r>
           </a:p>
           <a:p/>
           <a:p>
             <a:r>
-              <a:t>つまりアメリカのオンライン高校は、単に「オンラインで授業が受けられる」だけじゃなくて、</a:t>
-            </a:r>
-          </a:p>
-          <a:p>
-            <a:r>
-              <a:t>大学合格までの道筋を全部サポートする仕組みが整っているんです。</a:t>
-            </a:r>
-          </a:p>
-          <a:p>
-            <a:r>
-              <a:t>学費は年間1,800ドルから2,800ドル、日本円で約27万円から42万円くらいです。</a:t>
+              <a:t>学費は年間1,800ドルから2,800ドル、日本円で約27万円から42万円。</a:t>
+            </a:r>
+          </a:p>
+          <a:p/>
+          <a:p>
+            <a:r>
+              <a:t>で、皆さん気になりますよね。「日本から入学できるの？」って。</a:t>
+            </a:r>
+          </a:p>
+          <a:p>
+            <a:r>
+              <a:t>実はこれらの学校の一部は、日本にいながらオンラインで入学できます。</a:t>
+            </a:r>
+          </a:p>
+          <a:p>
+            <a:r>
+              <a:t>具体的な入学方法やステップは次回の第3回動画で詳しく解説しますので、</a:t>
+            </a:r>
+          </a:p>
+          <a:p>
+            <a:r>
+              <a:t>ぜひチャンネル登録しておいてくださいね。</a:t>
+            </a:r>
+          </a:p>
+          <a:p>
+            <a:r>
+              <a:t>また、このカリキュラムの考え方を日本で取り入れている</a:t>
+            </a:r>
+          </a:p>
+          <a:p>
+            <a:r>
+              <a:t>AIE国際高等学校のような学校もあります。</a:t>
+            </a:r>
+          </a:p>
+          <a:p>
+            <a:r>
+              <a:t>詳しくは概要欄にリンクを貼っておきます。</a:t>
             </a:r>
           </a:p>
         </p:txBody>
@@ -2311,85 +2502,86 @@
           <a:lstStyle/>
           <a:p>
             <a:r>
-              <a:t>次にヨーロッパです。ヨーロッパの教育で特徴的なのは、</a:t>
-            </a:r>
-          </a:p>
-          <a:p>
-            <a:r>
-              <a:t>「教育は人権である」という考え方が根底にあることです。</a:t>
-            </a:r>
-          </a:p>
-          <a:p>
-            <a:r>
-              <a:t>国連世界人権宣言をベースにしていて、</a:t>
-            </a:r>
-          </a:p>
-          <a:p>
-            <a:r>
-              <a:t>だからこそEU圏の学生は大学の授業料がほぼ無料、</a:t>
-            </a:r>
-          </a:p>
-          <a:p>
-            <a:r>
-              <a:t>あるいは非常に低額で学べるようになっています。</a:t>
+              <a:t>次にヨーロッパです。ヨーロッパの教育の根底には、</a:t>
+            </a:r>
+          </a:p>
+          <a:p>
+            <a:r>
+              <a:t>「教育は人権である」という考え方があります。</a:t>
+            </a:r>
+          </a:p>
+          <a:p>
+            <a:r>
+              <a:t>だからEU圏の学生は大学の授業料がほぼ無料なんですね。</a:t>
             </a:r>
           </a:p>
           <a:p/>
           <a:p>
             <a:r>
-              <a:t>オンライン高校では、英国カリキュラムや国際バカロレアなど</a:t>
-            </a:r>
-          </a:p>
-          <a:p>
-            <a:r>
-              <a:t>複数のカリキュラムが選べるのが特徴です。</a:t>
-            </a:r>
-          </a:p>
-          <a:p>
-            <a:r>
-              <a:t>面白いのは「ヨーロピアンアワー」という取り組みで、</a:t>
-            </a:r>
-          </a:p>
-          <a:p>
-            <a:r>
-              <a:t>違う国の生徒同士がオンラインで異文化交流する時間が設けられています。</a:t>
+              <a:t>オンライン高校では英国カリキュラムや国際バカロレアが選べますし、</a:t>
+            </a:r>
+          </a:p>
+          <a:p>
+            <a:r>
+              <a:t>面白いのは「ヨーロピアンアワー」という取り組みです。</a:t>
+            </a:r>
+          </a:p>
+          <a:p>
+            <a:r>
+              <a:t>フランスの生徒とドイツの生徒がオンラインで一緒に授業を受ける。</a:t>
+            </a:r>
+          </a:p>
+          <a:p>
+            <a:r>
+              <a:t>日本にいながらこの環境に参加できるとしたら、すごいですよね。</a:t>
             </a:r>
           </a:p>
           <a:p/>
           <a:p>
             <a:r>
-              <a:t>大学レベルでは、イギリスのOpen Universityや</a:t>
-            </a:r>
-          </a:p>
-          <a:p>
-            <a:r>
-              <a:t>ドイツのFernUniversitätが有名です。</a:t>
-            </a:r>
-          </a:p>
-          <a:p>
-            <a:r>
-              <a:t>ロンドン大学のオンラインプログラムは、</a:t>
-            </a:r>
-          </a:p>
-          <a:p>
-            <a:r>
-              <a:t>キャンパスで受ける授業と同等の質が保証されていると公式に言われています。</a:t>
+              <a:t>大学レベルでは、もっとすごいことが起きています。</a:t>
+            </a:r>
+          </a:p>
+          <a:p>
+            <a:r>
+              <a:t>例えばフランスの大学で取った単位が、ドイツの大学でもそのまま使える。</a:t>
+            </a:r>
+          </a:p>
+          <a:p>
+            <a:r>
+              <a:t>国をまたいで学んだり働いたりすることを前提にした仕組みなんです。</a:t>
+            </a:r>
+          </a:p>
+          <a:p>
+            <a:r>
+              <a:t>これを可能にしているのが「ESG」という共通の質保証ルールです。</a:t>
             </a:r>
           </a:p>
           <a:p/>
           <a:p>
             <a:r>
-              <a:t>そしてヨーロッパ全体で「ESG」という共通の質保証基準を持っているのが強みです。</a:t>
-            </a:r>
-          </a:p>
-          <a:p>
-            <a:r>
-              <a:t>どの国のどの大学でも、一定の基準を満たしているという安心感がある。</a:t>
-            </a:r>
-          </a:p>
-          <a:p>
-            <a:r>
-              <a:t>これは日本のオンライン教育にはまだ確立されていない仕組みです。</a:t>
+              <a:t>また、別の国の学生とオンラインで一緒にプロジェクトをやる</a:t>
+            </a:r>
+          </a:p>
+          <a:p>
+            <a:r>
+              <a:t>「COIL」という仕組みもあって、</a:t>
+            </a:r>
+          </a:p>
+          <a:p>
+            <a:r>
+              <a:t>自宅にいながら国際的なチームワークを経験できます。</a:t>
+            </a:r>
+          </a:p>
+          <a:p/>
+          <a:p>
+            <a:r>
+              <a:t>こういう仕組みは日本にはまだありません。</a:t>
+            </a:r>
+          </a:p>
+          <a:p>
+            <a:r>
+              <a:t>でも逆に言えば、日本のオンライン教育にはここに大きな伸びしろがあるということです。</a:t>
             </a:r>
           </a:p>
         </p:txBody>
@@ -2459,85 +2651,101 @@
           <a:lstStyle/>
           <a:p>
             <a:r>
-              <a:t>さて、ここからは日本の話です。</a:t>
-            </a:r>
-          </a:p>
-          <a:p>
-            <a:r>
-              <a:t>日本の通信制高校って、皆さんどんなイメージですか？</a:t>
-            </a:r>
-          </a:p>
-          <a:p>
-            <a:r>
-              <a:t>「全日制に通えなかった人の受け皿」というイメージがあるかもしれません。</a:t>
-            </a:r>
-          </a:p>
-          <a:p>
-            <a:r>
-              <a:t>でも実は、通信制高校はいま大きく進化しています。</a:t>
+              <a:t>さて、ここからは日本の通信制を世界と比較して評価してみましょう。</a:t>
+            </a:r>
+          </a:p>
+          <a:p>
+            <a:r>
+              <a:t>制度の基本は前回の第1回動画で解説しましたので、</a:t>
+            </a:r>
+          </a:p>
+          <a:p>
+            <a:r>
+              <a:t>今日は「世界と比べてどうなのか」に焦点を当てます。</a:t>
             </a:r>
           </a:p>
           <a:p/>
           <a:p>
             <a:r>
-              <a:t>まず制度の仕組みですが、毎日学校に通わなくていい単位制です。</a:t>
-            </a:r>
-          </a:p>
-          <a:p>
-            <a:r>
-              <a:t>レポートを出して、スクーリングに行って、試験を受けて単位を取る。</a:t>
-            </a:r>
-          </a:p>
-          <a:p>
-            <a:r>
-              <a:t>3年以上在籍して74単位を取れば卒業できます。</a:t>
-            </a:r>
-          </a:p>
-          <a:p>
-            <a:r>
-              <a:t>公立なら年間3万円から5万円、就学支援金を使えば実質無料のケースもあります。</a:t>
+              <a:t>まず強みから。学費の安さは世界最高レベルです。</a:t>
+            </a:r>
+          </a:p>
+          <a:p>
+            <a:r>
+              <a:t>公立なら年間1万6千円から5万円。アメリカの10分の1以下です。</a:t>
+            </a:r>
+          </a:p>
+          <a:p>
+            <a:r>
+              <a:t>しかも就学支援金で実質無料になるケースもある。</a:t>
+            </a:r>
+          </a:p>
+          <a:p>
+            <a:r>
+              <a:t>これは正直、すごいことなんですよ。</a:t>
             </a:r>
           </a:p>
           <a:p/>
           <a:p>
             <a:r>
-              <a:t>そして注目すべきは進路の実態です。</a:t>
-            </a:r>
-          </a:p>
-          <a:p>
-            <a:r>
-              <a:t>2023年度のデータでは、通信制高校の大学進学率が約27パーセント。</a:t>
-            </a:r>
-          </a:p>
-          <a:p>
-            <a:r>
-              <a:t>これは通信制の歴史上、過去最高の数字です。</a:t>
-            </a:r>
-          </a:p>
-          <a:p>
-            <a:r>
-              <a:t>専門学校を含めた合計進学率は52パーセントを超えました。</a:t>
+              <a:t>進学実績も過去最高を更新中で、N高からは東大に行く生徒もいますし、</a:t>
+            </a:r>
+          </a:p>
+          <a:p>
+            <a:r>
+              <a:t>ゼロ高のように起業家を育てるユニークな学校も出てきています。</a:t>
             </a:r>
           </a:p>
           <a:p/>
           <a:p>
             <a:r>
-              <a:t>N高等学校からは東京大学や海外の大学に進学する生徒も出ていますし、</a:t>
-            </a:r>
-          </a:p>
-          <a:p>
-            <a:r>
-              <a:t>ゼロ高等学院は「座学よりも行動」をモットーに、</a:t>
-            </a:r>
-          </a:p>
-          <a:p>
-            <a:r>
-              <a:t>高校生のうちから起業やインターンを経験させるユニークな教育を行っています。</a:t>
-            </a:r>
-          </a:p>
-          <a:p>
-            <a:r>
-              <a:t>通信制＝ドロップアウトの受け皿、という時代は終わりつつあるんです。</a:t>
+              <a:t>一方で伸びしろもはっきり見えます。</a:t>
+            </a:r>
+          </a:p>
+          <a:p>
+            <a:r>
+              <a:t>さっきアメリカのオンライン高校には</a:t>
+            </a:r>
+          </a:p>
+          <a:p>
+            <a:r>
+              <a:t>科目教員・ホームルーム教員・カウンセラーの3層サポートがあると言いましたよね。</a:t>
+            </a:r>
+          </a:p>
+          <a:p>
+            <a:r>
+              <a:t>日本でこれに近いのはN高やゼロ高など一部の学校だけで、</a:t>
+            </a:r>
+          </a:p>
+          <a:p>
+            <a:r>
+              <a:t>公立の通信制は基本的に自学自習。孤立して止まってしまうリスクがあります。</a:t>
+            </a:r>
+          </a:p>
+          <a:p/>
+          <a:p>
+            <a:r>
+              <a:t>また、ヨーロッパのような国際的な質保証の仕組みや、</a:t>
+            </a:r>
+          </a:p>
+          <a:p>
+            <a:r>
+              <a:t>国をまたいだ単位互換の仕組みもまだありません。</a:t>
+            </a:r>
+          </a:p>
+          <a:p>
+            <a:r>
+              <a:t>逆に言えば、ここが整備されれば日本の通信制は世界最強になる可能性がある。</a:t>
+            </a:r>
+          </a:p>
+          <a:p>
+            <a:r>
+              <a:t>皆さんが通信制を選んでいるということ自体が、</a:t>
+            </a:r>
+          </a:p>
+          <a:p>
+            <a:r>
+              <a:t>その変化の最前線にいるということなんです。</a:t>
             </a:r>
           </a:p>
         </p:txBody>
@@ -2607,34 +2815,34 @@
           <a:lstStyle/>
           <a:p>
             <a:r>
-              <a:t>日本のオンライン大学の新しい動きとして、2025年4月に開学した</a:t>
-            </a:r>
-          </a:p>
-          <a:p>
-            <a:r>
-              <a:t>ZEN大学を紹介しておきたいと思います。</a:t>
+              <a:t>日本のオンライン大学の新しい動きとして、</a:t>
+            </a:r>
+          </a:p>
+          <a:p>
+            <a:r>
+              <a:t>2025年4月に開学したZEN大学を紹介しておきたいと思います。</a:t>
             </a:r>
           </a:p>
           <a:p/>
           <a:p>
             <a:r>
-              <a:t>年間の授業料は38万円。これはアメリカのオンライン大学と比べると</a:t>
-            </a:r>
-          </a:p>
-          <a:p>
-            <a:r>
-              <a:t>圧倒的に安いです。知能情報社会学部という1つの学部に定員3,500名、</a:t>
-            </a:r>
-          </a:p>
-          <a:p>
-            <a:r>
-              <a:t>279科目から自分だけの時間割を組むオーダーメイドカリキュラムが特徴です。</a:t>
+              <a:t>注目してほしいのは学費です。年間38万円。</a:t>
+            </a:r>
+          </a:p>
+          <a:p>
+            <a:r>
+              <a:t>これ、次のスライドで学費比較するんですが、</a:t>
+            </a:r>
+          </a:p>
+          <a:p>
+            <a:r>
+              <a:t>アメリカのオンライン大学と比べると5分の1以下なんですよ。</a:t>
             </a:r>
           </a:p>
           <a:p/>
           <a:p>
             <a:r>
-              <a:t>数理、情報、文化・思想、社会、経済、デジタル産業という6つの分野を横断して学べて、</a:t>
+              <a:t>279科目から自分だけの時間割を組むオーダーメイドカリキュラムで、</a:t>
             </a:r>
           </a:p>
           <a:p>
@@ -2645,38 +2853,38 @@
           <a:p/>
           <a:p>
             <a:r>
-              <a:t>サポート体制も充実していて、クラス・コーチ、アカデミック・アドバイザー、</a:t>
-            </a:r>
-          </a:p>
-          <a:p>
-            <a:r>
-              <a:t>キャリアアドバイザーという3種類のメンターがつきます。</a:t>
-            </a:r>
-          </a:p>
-          <a:p>
-            <a:r>
-              <a:t>アメリカのオンライン高校のサポート体制に近い手厚さですよね。</a:t>
+              <a:t>そして面白いのが、さっきアメリカのオンライン高校の3層サポートを紹介しましたよね。</a:t>
+            </a:r>
+          </a:p>
+          <a:p>
+            <a:r>
+              <a:t>ZEN大学もクラス・コーチ、アカデミック・アドバイザー、</a:t>
+            </a:r>
+          </a:p>
+          <a:p>
+            <a:r>
+              <a:t>キャリアアドバイザーという3種類のメンターがつくんです。</a:t>
+            </a:r>
+          </a:p>
+          <a:p>
+            <a:r>
+              <a:t>日本の大学でここまで手厚いのは珍しい。</a:t>
+            </a:r>
+          </a:p>
+          <a:p>
+            <a:r>
+              <a:t>アメリカの良いところを取り入れようとしている印象を受けます。</a:t>
             </a:r>
           </a:p>
           <a:p/>
           <a:p>
             <a:r>
-              <a:t>pixivとの提携科目があったり、東浩紀さんの対話型講座があったり、</a:t>
-            </a:r>
-          </a:p>
-          <a:p>
-            <a:r>
-              <a:t>従来の日本の大学にはないユニークな試みが始まっています。</a:t>
-            </a:r>
-          </a:p>
-          <a:p>
-            <a:r>
-              <a:t>日本のオンライン大学はまだ黎明期ですが、</a:t>
-            </a:r>
-          </a:p>
-          <a:p>
-            <a:r>
-              <a:t>ZEN大学がその成功モデルになれるかどうか、注目されています。</a:t>
+              <a:t>日本のオンライン大学はまだ始まったばかりですが、</a:t>
+            </a:r>
+          </a:p>
+          <a:p>
+            <a:r>
+              <a:t>ZEN大学がその成功モデルになれるかどうか、注目ですね。</a:t>
             </a:r>
           </a:p>
         </p:txBody>
@@ -5842,11 +6050,11 @@
               </a:defRPr>
             </a:pPr>
             <a:r>
-              <a:t>日本の教育は世界から</a:t>
+              <a:t>通信制・オンラインで学ぶあなたへ</a:t>
             </a:r>
             <a:br/>
             <a:r>
-              <a:t>どう見えているのか？</a:t>
+              <a:t>── 世界と比べたら、意外な事実が見えた ──</a:t>
             </a:r>
           </a:p>
         </p:txBody>
@@ -5882,11 +6090,11 @@
               </a:defRPr>
             </a:pPr>
             <a:r>
-              <a:t>日米欧オンライン教育の徹底比較</a:t>
+              <a:t>教育の選択肢シリーズ 第2回</a:t>
             </a:r>
             <a:br/>
             <a:r>
-              <a:t>── あなたの学び方は、世界基準ですか？ ──</a:t>
+              <a:t>日米欧オンライン教育 徹底比較</a:t>
             </a:r>
           </a:p>
         </p:txBody>
@@ -8131,7 +8339,7 @@
               </a:defRPr>
             </a:pPr>
             <a:r>
-              <a:t>MOOCsの世界 ── Coursera・Udemyで何ができるか</a:t>
+              <a:t>今日からできること ── MOOCsで世界の授業を体験する</a:t>
             </a:r>
           </a:p>
         </p:txBody>
@@ -8260,9 +8468,6 @@
                 <a:latin typeface="Yu Gothic"/>
               </a:defRPr>
             </a:pPr>
-            <a:r>
-              <a:t>  ・企業向けサービスも充実（Coursera for Teams）</a:t>
-            </a:r>
           </a:p>
           <a:p>
             <a:pPr>
@@ -8276,6 +8481,9 @@
                 <a:latin typeface="Yu Gothic"/>
               </a:defRPr>
             </a:pPr>
+            <a:r>
+              <a:t>【Udemy】 コースごとの買い切り（セールで1,200円台も）</a:t>
+            </a:r>
           </a:p>
           <a:p>
             <a:pPr>
@@ -8290,7 +8498,7 @@
               </a:defRPr>
             </a:pPr>
             <a:r>
-              <a:t>【Udemy】 コースごとの買い切り（セールで1,200円台も）</a:t>
+              <a:t>  ・20万コース以上、最も幅広い分野をカバー</a:t>
             </a:r>
           </a:p>
           <a:p>
@@ -8305,9 +8513,6 @@
                 <a:latin typeface="Yu Gothic"/>
               </a:defRPr>
             </a:pPr>
-            <a:r>
-              <a:t>  ・20万コース以上、最も幅広い分野をカバー</a:t>
-            </a:r>
           </a:p>
           <a:p>
             <a:pPr>
@@ -8321,6 +8526,9 @@
                 <a:latin typeface="Yu Gothic"/>
               </a:defRPr>
             </a:pPr>
+            <a:r>
+              <a:t>【edX】 東大がMIT・ハーバードと連携して講座を公開</a:t>
+            </a:r>
           </a:p>
           <a:p>
             <a:pPr>
@@ -8334,9 +8542,6 @@
                 <a:latin typeface="Yu Gothic"/>
               </a:defRPr>
             </a:pPr>
-            <a:r>
-              <a:t>【edX】 非営利の教育プラットフォーム</a:t>
-            </a:r>
           </a:p>
           <a:p>
             <a:pPr>
@@ -8351,7 +8556,7 @@
               </a:defRPr>
             </a:pPr>
             <a:r>
-              <a:t>  ・東大がMIT・ハーバードと連携して講座を公開</a:t>
+              <a:t>【オンライン英会話】 月額2,000〜13,000円</a:t>
             </a:r>
           </a:p>
           <a:p>
@@ -8380,7 +8585,7 @@
               </a:defRPr>
             </a:pPr>
             <a:r>
-              <a:t>【オンライン英会話】 月額2,000〜13,000円</a:t>
+              <a:t>&gt;&gt;&gt; 今日のアクション &lt;&lt;&lt;</a:t>
             </a:r>
           </a:p>
           <a:p>
@@ -8396,7 +8601,7 @@
               </a:defRPr>
             </a:pPr>
             <a:r>
-              <a:t>  ・スキマ時間で学習、費用対効果が高い</a:t>
+              <a:t>Courseraで「Google Career Certificates」と検索してみよう</a:t>
             </a:r>
           </a:p>
           <a:p>
@@ -8411,21 +8616,8 @@
                 <a:latin typeface="Yu Gothic"/>
               </a:defRPr>
             </a:pPr>
-          </a:p>
-          <a:p>
-            <a:pPr>
-              <a:spcAft>
-                <a:spcPts val="600"/>
-              </a:spcAft>
-              <a:defRPr sz="1300">
-                <a:solidFill>
-                  <a:srgbClr val="333333"/>
-                </a:solidFill>
-                <a:latin typeface="Yu Gothic"/>
-              </a:defRPr>
-            </a:pPr>
-            <a:r>
-              <a:t>ポイント：講義は無料でも、修了証を取るには有料プランが必要なケースが多い</a:t>
+            <a:r>
+              <a:t>→ 無料で内容が見られる。これが世界基準のオンライン学習です</a:t>
             </a:r>
           </a:p>
         </p:txBody>
@@ -8644,7 +8836,7 @@
               </a:defRPr>
             </a:pPr>
             <a:r>
-              <a:t>日本のオンライン教育に必要な5つのこと</a:t>
+              <a:t>あなたが今日からできる5つのこと</a:t>
             </a:r>
           </a:p>
         </p:txBody>
@@ -8726,7 +8918,7 @@
               </a:defRPr>
             </a:pPr>
             <a:r>
-              <a:t>1. 質保証の仕組みを整える</a:t>
+              <a:t>1. Courseraで無料講座を1つ受けてみる</a:t>
             </a:r>
           </a:p>
           <a:p>
@@ -8742,7 +8934,7 @@
               </a:defRPr>
             </a:pPr>
             <a:r>
-              <a:t>   → 欧州のESGのように、オンライン教育専用の品質基準を作る</a:t>
+              <a:t>   → 「Google Career Certificates」がおすすめ</a:t>
             </a:r>
           </a:p>
           <a:p>
@@ -8771,7 +8963,7 @@
               </a:defRPr>
             </a:pPr>
             <a:r>
-              <a:t>2. デジタルデバイドを解消する</a:t>
+              <a:t>2. 自分の学校のサポート体制を確認する</a:t>
             </a:r>
           </a:p>
           <a:p>
@@ -8787,7 +8979,7 @@
               </a:defRPr>
             </a:pPr>
             <a:r>
-              <a:t>   → ネット環境やデバイスが手に入らない人を取り残さない</a:t>
+              <a:t>   → カウンセラー、キャリア相談、課外活動は使える？</a:t>
             </a:r>
           </a:p>
           <a:p>
@@ -8816,7 +9008,7 @@
               </a:defRPr>
             </a:pPr>
             <a:r>
-              <a:t>3. オンラインと対面を組み合わせた「ハイブリッド型」を広げる</a:t>
+              <a:t>3. 海外オンライン高校・大学のサイトを見てみる</a:t>
             </a:r>
           </a:p>
           <a:p>
@@ -8832,7 +9024,7 @@
               </a:defRPr>
             </a:pPr>
             <a:r>
-              <a:t>   → 欧米のCOIL（国際共同学習）のように、交流の機会を増やす</a:t>
+              <a:t>   → 「自分でも入れるかも」と思えたら、次回の第3回動画へ</a:t>
             </a:r>
           </a:p>
           <a:p>
@@ -8861,7 +9053,7 @@
               </a:defRPr>
             </a:pPr>
             <a:r>
-              <a:t>4. 教員のオンライン指導スキルを底上げする</a:t>
+              <a:t>4. ギャップイヤーの体験談をYouTubeで検索する</a:t>
             </a:r>
           </a:p>
           <a:p>
@@ -8877,7 +9069,7 @@
               </a:defRPr>
             </a:pPr>
             <a:r>
-              <a:t>   → ファシリテーター、コースデザイナーとしての新しい役割</a:t>
+              <a:t>   → 「gap year experience」で検索すると大量に出てくる</a:t>
             </a:r>
           </a:p>
           <a:p>
@@ -8906,7 +9098,7 @@
               </a:defRPr>
             </a:pPr>
             <a:r>
-              <a:t>5. キャリア支援を充実させる</a:t>
+              <a:t>5. この動画のコメント欄で「自分の学び方」をシェアする</a:t>
             </a:r>
           </a:p>
           <a:p>
@@ -8922,7 +9114,7 @@
               </a:defRPr>
             </a:pPr>
             <a:r>
-              <a:t>   → 米国のように出願・就職まで一貫してサポートする体制へ</a:t>
+              <a:t>   → あなたの経験が、同じ悩みを持つ誰かの助けになる</a:t>
             </a:r>
           </a:p>
         </p:txBody>
@@ -9141,7 +9333,7 @@
               </a:defRPr>
             </a:pPr>
             <a:r>
-              <a:t>まとめ ── これからの「学び方」をどう選ぶか</a:t>
+              <a:t>まとめ ── あなたの学びは、世界とつながっている</a:t>
             </a:r>
           </a:p>
         </p:txBody>
@@ -9239,7 +9431,7 @@
               </a:defRPr>
             </a:pPr>
             <a:r>
-              <a:t>  ・オンライン教育は一時的なブームではない</a:t>
+              <a:t>  ・オンライン教育は一時的なブームではなく、教育の「中核」へ</a:t>
             </a:r>
           </a:p>
           <a:p>
@@ -9255,7 +9447,7 @@
               </a:defRPr>
             </a:pPr>
             <a:r>
-              <a:t>  ・市場は年率7.75%で成長、2030年には約85兆円規模に</a:t>
+              <a:t>  ・2030年には約85兆円規模に成長</a:t>
             </a:r>
           </a:p>
           <a:p>
@@ -9284,7 +9476,7 @@
               </a:defRPr>
             </a:pPr>
             <a:r>
-              <a:t>【各国の強み】</a:t>
+              <a:t>【日本の通信制は世界と比較して…】</a:t>
             </a:r>
           </a:p>
           <a:p>
@@ -9300,7 +9492,7 @@
               </a:defRPr>
             </a:pPr>
             <a:r>
-              <a:t>  ・アメリカ：大学進学を徹底サポートする「伴走型」</a:t>
+              <a:t>  ・学費の安さは世界最高レベル（強み）</a:t>
             </a:r>
           </a:p>
           <a:p>
@@ -9316,7 +9508,7 @@
               </a:defRPr>
             </a:pPr>
             <a:r>
-              <a:t>  ・ヨーロッパ：「教育は人権」、質保証の共通基準ESG</a:t>
+              <a:t>  ・サポート体制と質保証の仕組みに伸びしろ</a:t>
             </a:r>
           </a:p>
           <a:p>
@@ -9331,9 +9523,6 @@
                 <a:latin typeface="Yu Gothic"/>
               </a:defRPr>
             </a:pPr>
-            <a:r>
-              <a:t>  ・日本：通信制の柔軟性とコストの安さ、進学率は過去最高</a:t>
-            </a:r>
           </a:p>
           <a:p>
             <a:pPr>
@@ -9347,6 +9536,9 @@
                 <a:latin typeface="Yu Gothic"/>
               </a:defRPr>
             </a:pPr>
+            <a:r>
+              <a:t>【あなたは「変化の最前線」にいる】</a:t>
+            </a:r>
           </a:p>
           <a:p>
             <a:pPr>
@@ -9361,7 +9553,7 @@
               </a:defRPr>
             </a:pPr>
             <a:r>
-              <a:t>【あなたにとっての「最適解」は？】</a:t>
+              <a:t>  ・通信制、MOOCs、ギャップイヤー、留学…</a:t>
             </a:r>
           </a:p>
           <a:p>
@@ -9377,7 +9569,7 @@
               </a:defRPr>
             </a:pPr>
             <a:r>
-              <a:t>  ・学びの選択肢は、通信制、MOOCs、ギャップイヤー、留学…</a:t>
+              <a:t>    「全日制に通う」だけが正解ではない時代</a:t>
             </a:r>
           </a:p>
           <a:p>
@@ -9393,7 +9585,7 @@
               </a:defRPr>
             </a:pPr>
             <a:r>
-              <a:t>    もはや「全日制の学校に通う」だけが正解ではない時代</a:t>
+              <a:t>  ・大事なのは「どう学ぶか」を自分で選ぶこと</a:t>
             </a:r>
           </a:p>
           <a:p>
@@ -9408,8 +9600,53 @@
                 <a:latin typeface="Yu Gothic"/>
               </a:defRPr>
             </a:pPr>
-            <a:r>
-              <a:t>  ・大事なのは「何を学ぶか」ではなく「どう学ぶか」を自分で選ぶこと</a:t>
+          </a:p>
+          <a:p>
+            <a:pPr>
+              <a:spcAft>
+                <a:spcPts val="600"/>
+              </a:spcAft>
+              <a:defRPr sz="1300">
+                <a:solidFill>
+                  <a:srgbClr val="333333"/>
+                </a:solidFill>
+                <a:latin typeface="Yu Gothic"/>
+              </a:defRPr>
+            </a:pPr>
+            <a:r>
+              <a:t>教育の選択肢シリーズ</a:t>
+            </a:r>
+          </a:p>
+          <a:p>
+            <a:pPr>
+              <a:spcAft>
+                <a:spcPts val="600"/>
+              </a:spcAft>
+              <a:defRPr sz="1300">
+                <a:solidFill>
+                  <a:srgbClr val="333333"/>
+                </a:solidFill>
+                <a:latin typeface="Yu Gothic"/>
+              </a:defRPr>
+            </a:pPr>
+            <a:r>
+              <a:t>  第1回：通信制高校の選び方  /  第2回：本動画（日米欧比較）</a:t>
+            </a:r>
+          </a:p>
+          <a:p>
+            <a:pPr>
+              <a:spcAft>
+                <a:spcPts val="600"/>
+              </a:spcAft>
+              <a:defRPr sz="1300">
+                <a:solidFill>
+                  <a:srgbClr val="333333"/>
+                </a:solidFill>
+                <a:latin typeface="Yu Gothic"/>
+              </a:defRPr>
+            </a:pPr>
+            <a:r>
+              <a:t>  第3回：海外の通信制に日本から入学する方法</a:t>
             </a:r>
           </a:p>
         </p:txBody>
@@ -9669,11 +9906,11 @@
             <a:br/>
             <a:br/>
             <a:r>
-              <a:t>コメント欄で感想や質問もお待ちしています</a:t>
+              <a:t>コメント欄であなたの「学び方」をシェアしてください</a:t>
             </a:r>
             <a:br/>
             <a:r>
-              <a:t>「自分はこう学んでいる」というシェアも大歓迎です</a:t>
+              <a:t>同じ悩みを持つ誰かの助けになります</a:t>
             </a:r>
           </a:p>
         </p:txBody>
@@ -9686,8 +9923,8 @@
         </p:nvSpPr>
         <p:spPr>
           <a:xfrm>
-            <a:off x="914400" y="3657600"/>
-            <a:ext cx="7315200" cy="457200"/>
+            <a:off x="914400" y="3566160"/>
+            <a:ext cx="7315200" cy="731520"/>
           </a:xfrm>
           <a:prstGeom prst="rect">
             <a:avLst/>
@@ -9701,7 +9938,7 @@
           <a:lstStyle/>
           <a:p>
             <a:pPr algn="ctr">
-              <a:defRPr sz="1300" b="1">
+              <a:defRPr sz="1200" b="1">
                 <a:solidFill>
                   <a:srgbClr val="B8860B"/>
                 </a:solidFill>
@@ -9709,7 +9946,11 @@
               </a:defRPr>
             </a:pPr>
             <a:r>
-              <a:t>次回予告：「海外の通信制高校に日本から入学する方法」</a:t>
+              <a:t>教育の選択肢シリーズ</a:t>
+            </a:r>
+            <a:br/>
+            <a:r>
+              <a:t>第1回：通信制高校の選び方（公開中）  │  第3回：海外の通信制に日本から入学する方法（次回）</a:t>
             </a:r>
           </a:p>
         </p:txBody>
@@ -9928,7 +10169,7 @@
               </a:defRPr>
             </a:pPr>
             <a:r>
-              <a:t>今日お話しすること</a:t>
+              <a:t>教育の選択肢シリーズ 第2回 ── 今日お話しすること</a:t>
             </a:r>
           </a:p>
         </p:txBody>
@@ -10126,7 +10367,7 @@
               </a:defRPr>
             </a:pPr>
             <a:r>
-              <a:t>5. 日本の通信制高校・オンライン大学 ── 実は進化している</a:t>
+              <a:t>5. 日本の通信制 ── 世界と比べた「強み」と「伸びしろ」</a:t>
             </a:r>
           </a:p>
           <a:p>
@@ -10184,36 +10425,7 @@
               </a:defRPr>
             </a:pPr>
             <a:r>
-              <a:t>7. MOOCsの活用法 ── Coursera・Udemyで何ができるか</a:t>
-            </a:r>
-          </a:p>
-          <a:p>
-            <a:pPr>
-              <a:spcAft>
-                <a:spcPts val="600"/>
-              </a:spcAft>
-              <a:defRPr sz="1300">
-                <a:solidFill>
-                  <a:srgbClr val="333333"/>
-                </a:solidFill>
-                <a:latin typeface="Yu Gothic"/>
-              </a:defRPr>
-            </a:pPr>
-          </a:p>
-          <a:p>
-            <a:pPr>
-              <a:spcAft>
-                <a:spcPts val="600"/>
-              </a:spcAft>
-              <a:defRPr sz="1300">
-                <a:solidFill>
-                  <a:srgbClr val="333333"/>
-                </a:solidFill>
-                <a:latin typeface="Yu Gothic"/>
-              </a:defRPr>
-            </a:pPr>
-            <a:r>
-              <a:t>8. まとめ ── これからの「学び方」をどう選ぶか</a:t>
+              <a:t>7. 今日からできること ── MOOCs活用と具体的な次のステップ</a:t>
             </a:r>
           </a:p>
         </p:txBody>
@@ -13309,7 +13521,7 @@
               </a:defRPr>
             </a:pPr>
             <a:r>
-              <a:t>・理念：「高等教育は人権である」</a:t>
+              <a:t>・「高等教育は人権である」が基本理念</a:t>
             </a:r>
           </a:p>
           <a:p>
@@ -13325,7 +13537,7 @@
               </a:defRPr>
             </a:pPr>
             <a:r>
-              <a:t>  → 国連世界人権宣言がベース</a:t>
+              <a:t>・英国/米国カリキュラム、IBプログラム</a:t>
             </a:r>
           </a:p>
           <a:p>
@@ -13341,39 +13553,7 @@
               </a:defRPr>
             </a:pPr>
             <a:r>
-              <a:t>・英国/米国カリキュラム、IBプログラム</a:t>
-            </a:r>
-          </a:p>
-          <a:p>
-            <a:pPr>
-              <a:spcAft>
-                <a:spcPts val="600"/>
-              </a:spcAft>
-              <a:defRPr sz="1100">
-                <a:solidFill>
-                  <a:srgbClr val="333333"/>
-                </a:solidFill>
-                <a:latin typeface="Yu Gothic"/>
-              </a:defRPr>
-            </a:pPr>
-            <a:r>
-              <a:t>・8つのキーコンピテンシーの育成</a:t>
-            </a:r>
-          </a:p>
-          <a:p>
-            <a:pPr>
-              <a:spcAft>
-                <a:spcPts val="600"/>
-              </a:spcAft>
-              <a:defRPr sz="1100">
-                <a:solidFill>
-                  <a:srgbClr val="333333"/>
-                </a:solidFill>
-                <a:latin typeface="Yu Gothic"/>
-              </a:defRPr>
-            </a:pPr>
-            <a:r>
-              <a:t>・「ヨーロピアンアワー」で異文化交流</a:t>
+              <a:t>・「ヨーロピアンアワー」で違う国の生徒と交流</a:t>
             </a:r>
           </a:p>
           <a:p>
@@ -13619,7 +13799,23 @@
               </a:defRPr>
             </a:pPr>
             <a:r>
-              <a:t>・ESGという共通の質保証基準で信頼性を担保</a:t>
+              <a:t>・フランスの単位がドイツでも使える</a:t>
+            </a:r>
+          </a:p>
+          <a:p>
+            <a:pPr>
+              <a:spcAft>
+                <a:spcPts val="600"/>
+              </a:spcAft>
+              <a:defRPr sz="1100">
+                <a:solidFill>
+                  <a:srgbClr val="333333"/>
+                </a:solidFill>
+                <a:latin typeface="Yu Gothic"/>
+              </a:defRPr>
+            </a:pPr>
+            <a:r>
+              <a:t>  → 共通ルール「ESG」が国をまたいだ学びを保証</a:t>
             </a:r>
           </a:p>
         </p:txBody>
@@ -13838,7 +14034,7 @@
               </a:defRPr>
             </a:pPr>
             <a:r>
-              <a:t>日本の通信制高校 ── 実は進化し続けている</a:t>
+              <a:t>日本の通信制 ── 世界と比べた「強み」と「伸びしろ」</a:t>
             </a:r>
           </a:p>
         </p:txBody>
@@ -13960,7 +14156,7 @@
               </a:defRPr>
             </a:pPr>
             <a:r>
-              <a:t>制度の仕組み</a:t>
+              <a:t>世界に誇れる強み</a:t>
             </a:r>
           </a:p>
         </p:txBody>
@@ -13999,7 +14195,7 @@
               </a:defRPr>
             </a:pPr>
             <a:r>
-              <a:t>・毎日通わなくていい（単位制）</a:t>
+              <a:t>・学費の安さは世界最高レベル</a:t>
             </a:r>
           </a:p>
           <a:p>
@@ -14015,7 +14211,7 @@
               </a:defRPr>
             </a:pPr>
             <a:r>
-              <a:t>・レポート提出＋スクーリング＋試験で単位取得</a:t>
+              <a:t>  公立：年間1.6万〜5万円（米国の1/10以下）</a:t>
             </a:r>
           </a:p>
           <a:p>
@@ -14031,7 +14227,7 @@
               </a:defRPr>
             </a:pPr>
             <a:r>
-              <a:t>・卒業要件：3年以上在籍＋74単位以上</a:t>
+              <a:t>  就学支援金で実質無料も可能</a:t>
             </a:r>
           </a:p>
           <a:p>
@@ -14047,7 +14243,7 @@
               </a:defRPr>
             </a:pPr>
             <a:r>
-              <a:t>・特別活動への30時間以上の参加</a:t>
+              <a:t>・大学進学率が過去最高を更新中（27%）</a:t>
             </a:r>
           </a:p>
           <a:p>
@@ -14063,7 +14259,7 @@
               </a:defRPr>
             </a:pPr>
             <a:r>
-              <a:t>・公立：年間3万〜5万円</a:t>
+              <a:t>  専門学校含む合計進学率は52%超</a:t>
             </a:r>
           </a:p>
           <a:p>
@@ -14079,7 +14275,7 @@
               </a:defRPr>
             </a:pPr>
             <a:r>
-              <a:t>・私立：年間10万〜100万円</a:t>
+              <a:t>・N高：東大・海外大学への進学実績</a:t>
             </a:r>
           </a:p>
           <a:p>
@@ -14095,7 +14291,7 @@
               </a:defRPr>
             </a:pPr>
             <a:r>
-              <a:t>・就学支援金で実質無料になるケースも</a:t>
+              <a:t>・ゼロ高：起業家育成・インターン</a:t>
             </a:r>
           </a:p>
         </p:txBody>
@@ -14174,7 +14370,7 @@
               </a:defRPr>
             </a:pPr>
             <a:r>
-              <a:t>進路の実態（最新データ）</a:t>
+              <a:t>世界と比べた「伸びしろ」</a:t>
             </a:r>
           </a:p>
         </p:txBody>
@@ -14213,7 +14409,7 @@
               </a:defRPr>
             </a:pPr>
             <a:r>
-              <a:t>・大学進学率：約27%（2023年度）</a:t>
+              <a:t>・サポート体制の格差が大きい</a:t>
             </a:r>
           </a:p>
           <a:p>
@@ -14229,7 +14425,7 @@
               </a:defRPr>
             </a:pPr>
             <a:r>
-              <a:t>  → 通信制の歴史上、過去最高</a:t>
+              <a:t>  → 米国のような3層サポートは一部校のみ</a:t>
             </a:r>
           </a:p>
           <a:p>
@@ -14245,7 +14441,7 @@
               </a:defRPr>
             </a:pPr>
             <a:r>
-              <a:t>・専門学校等含む合計進学率：52%超</a:t>
+              <a:t>・国際的な質保証の仕組みがない</a:t>
             </a:r>
           </a:p>
           <a:p>
@@ -14261,7 +14457,7 @@
               </a:defRPr>
             </a:pPr>
             <a:r>
-              <a:t>・N高等学校：東大・海外大学への進学実績も</a:t>
+              <a:t>  → 欧州のESGに相当するものが未整備</a:t>
             </a:r>
           </a:p>
           <a:p>
@@ -14277,7 +14473,7 @@
               </a:defRPr>
             </a:pPr>
             <a:r>
-              <a:t>・ゼロ高等学院：起業家育成に特化</a:t>
+              <a:t>・国をまたいだ単位互換の仕組みがない</a:t>
             </a:r>
           </a:p>
           <a:p>
@@ -14293,7 +14489,7 @@
               </a:defRPr>
             </a:pPr>
             <a:r>
-              <a:t>  留学・インターンシップが充実</a:t>
+              <a:t>・キャリア支援が大学出願に比べ手薄</a:t>
             </a:r>
           </a:p>
           <a:p>
@@ -14309,7 +14505,7 @@
               </a:defRPr>
             </a:pPr>
             <a:r>
-              <a:t>・柔軟な学習で早期から受験勉強が可能</a:t>
+              <a:t>・公立通信制では孤立リスクが課題</a:t>
             </a:r>
           </a:p>
         </p:txBody>
